--- a/CLOUD/Distributed_Cloud_DevOps_Presentation.pptx
+++ b/CLOUD/Distributed_Cloud_DevOps_Presentation.pptx
@@ -6,19 +6,16 @@
   </p:sldMasterIdLst>
   <p:sldIdLst>
     <p:sldId id="256" r:id="rId2"/>
-    <p:sldId id="258" r:id="rId3"/>
-    <p:sldId id="259" r:id="rId4"/>
-    <p:sldId id="260" r:id="rId5"/>
-    <p:sldId id="261" r:id="rId6"/>
-    <p:sldId id="270" r:id="rId7"/>
-    <p:sldId id="262" r:id="rId8"/>
-    <p:sldId id="269" r:id="rId9"/>
-    <p:sldId id="263" r:id="rId10"/>
-    <p:sldId id="264" r:id="rId11"/>
-    <p:sldId id="265" r:id="rId12"/>
-    <p:sldId id="266" r:id="rId13"/>
-    <p:sldId id="267" r:id="rId14"/>
-    <p:sldId id="268" r:id="rId15"/>
+    <p:sldId id="261" r:id="rId3"/>
+    <p:sldId id="270" r:id="rId4"/>
+    <p:sldId id="262" r:id="rId5"/>
+    <p:sldId id="269" r:id="rId6"/>
+    <p:sldId id="263" r:id="rId7"/>
+    <p:sldId id="264" r:id="rId8"/>
+    <p:sldId id="265" r:id="rId9"/>
+    <p:sldId id="266" r:id="rId10"/>
+    <p:sldId id="267" r:id="rId11"/>
+    <p:sldId id="268" r:id="rId12"/>
   </p:sldIdLst>
   <p:sldSz cx="9144000" cy="6858000" type="screen4x3"/>
   <p:notesSz cx="6858000" cy="9144000"/>
@@ -3121,13 +3118,13 @@
         </p:spPr>
         <p:txBody>
           <a:bodyPr>
-            <a:normAutofit fontScale="90000"/>
+            <a:normAutofit/>
           </a:bodyPr>
           <a:lstStyle/>
           <a:p>
             <a:r>
               <a:rPr dirty="0"/>
-              <a:t>Understanding Distributed Cloud Computing, Edge Computing, Containers, Docker, Kubernetes, and DevOps</a:t>
+              <a:t>Containers, Docker, Kubernetes, and DevOps</a:t>
             </a:r>
           </a:p>
         </p:txBody>
@@ -3220,18 +3217,13 @@
             <p:ph type="title"/>
           </p:nvPr>
         </p:nvSpPr>
-        <p:spPr>
-          <a:xfrm>
-            <a:off x="457200" y="274638"/>
-            <a:ext cx="8229600" cy="1143000"/>
-          </a:xfrm>
-        </p:spPr>
-        <p:txBody>
-          <a:bodyPr/>
-          <a:lstStyle/>
-          <a:p>
-            <a:r>
-              <a:t>Docker vs Kubernetes</a:t>
+        <p:spPr/>
+        <p:txBody>
+          <a:bodyPr/>
+          <a:lstStyle/>
+          <a:p>
+            <a:r>
+              <a:t>Summary</a:t>
             </a:r>
           </a:p>
         </p:txBody>
@@ -3246,61 +3238,32 @@
             <p:ph idx="1"/>
           </p:nvPr>
         </p:nvSpPr>
-        <p:spPr>
-          <a:xfrm>
-            <a:off x="457200" y="1166018"/>
-            <a:ext cx="8229600" cy="4525963"/>
-          </a:xfrm>
-        </p:spPr>
-        <p:txBody>
-          <a:bodyPr>
-            <a:normAutofit/>
-          </a:bodyPr>
-          <a:lstStyle/>
-          <a:p>
-            <a:r>
-              <a:rPr sz="2400" dirty="0"/>
-              <a:t>- Docker: Containerization, limited scalability, manual deployment.</a:t>
-            </a:r>
-          </a:p>
-          <a:p>
-            <a:r>
-              <a:rPr sz="2400" dirty="0"/>
-              <a:t>- Kubernetes: Orchestration, highly scalable, automated deployment.</a:t>
-            </a:r>
-          </a:p>
-        </p:txBody>
-      </p:sp>
-      <p:pic>
-        <p:nvPicPr>
-          <p:cNvPr id="6" name="Picture 5">
-            <a:extLst>
-              <a:ext uri="{FF2B5EF4-FFF2-40B4-BE49-F238E27FC236}">
-                <a16:creationId xmlns:a16="http://schemas.microsoft.com/office/drawing/2014/main" id="{95E59E98-2656-46DB-9721-5127C417DECA}"/>
-              </a:ext>
-            </a:extLst>
-          </p:cNvPr>
-          <p:cNvPicPr>
-            <a:picLocks noChangeAspect="1"/>
-          </p:cNvPicPr>
-          <p:nvPr/>
-        </p:nvPicPr>
-        <p:blipFill>
-          <a:blip r:embed="rId2"/>
-          <a:stretch>
-            <a:fillRect/>
-          </a:stretch>
-        </p:blipFill>
-        <p:spPr>
-          <a:xfrm>
-            <a:off x="1035864" y="2822139"/>
-            <a:ext cx="7323283" cy="3381438"/>
-          </a:xfrm>
-          <a:prstGeom prst="rect">
-            <a:avLst/>
-          </a:prstGeom>
-        </p:spPr>
-      </p:pic>
+        <p:spPr/>
+        <p:txBody>
+          <a:bodyPr/>
+          <a:lstStyle/>
+          <a:p>
+            <a:r>
+              <a:t>- Distributed Cloud vs Edge Computing: Centralized vs decentralized.</a:t>
+            </a:r>
+          </a:p>
+          <a:p>
+            <a:r>
+              <a:t>- Containers &amp; Docker: Lightweight application deployment.</a:t>
+            </a:r>
+          </a:p>
+          <a:p>
+            <a:r>
+              <a:t>- Kubernetes: Container orchestration.</a:t>
+            </a:r>
+          </a:p>
+          <a:p>
+            <a:r>
+              <a:t>- DevOps: Streamlined software development and deployment.</a:t>
+            </a:r>
+          </a:p>
+        </p:txBody>
+      </p:sp>
     </p:spTree>
   </p:cSld>
   <p:clrMapOvr>
@@ -3310,269 +3273,6 @@
 </file>
 
 <file path=ppt/slides/slide11.xml><?xml version="1.0" encoding="utf-8"?>
-<p:sld xmlns:a="http://schemas.openxmlformats.org/drawingml/2006/main" xmlns:r="http://schemas.openxmlformats.org/officeDocument/2006/relationships" xmlns:p="http://schemas.openxmlformats.org/presentationml/2006/main">
-  <p:cSld>
-    <p:spTree>
-      <p:nvGrpSpPr>
-        <p:cNvPr id="1" name=""/>
-        <p:cNvGrpSpPr/>
-        <p:nvPr/>
-      </p:nvGrpSpPr>
-      <p:grpSpPr>
-        <a:xfrm>
-          <a:off x="0" y="0"/>
-          <a:ext cx="0" cy="0"/>
-          <a:chOff x="0" y="0"/>
-          <a:chExt cx="0" cy="0"/>
-        </a:xfrm>
-      </p:grpSpPr>
-      <p:sp>
-        <p:nvSpPr>
-          <p:cNvPr id="2" name="Title 1"/>
-          <p:cNvSpPr>
-            <a:spLocks noGrp="1"/>
-          </p:cNvSpPr>
-          <p:nvPr>
-            <p:ph type="title"/>
-          </p:nvPr>
-        </p:nvSpPr>
-        <p:spPr/>
-        <p:txBody>
-          <a:bodyPr/>
-          <a:lstStyle/>
-          <a:p>
-            <a:r>
-              <a:t>What is DevOps?</a:t>
-            </a:r>
-          </a:p>
-        </p:txBody>
-      </p:sp>
-      <p:sp>
-        <p:nvSpPr>
-          <p:cNvPr id="3" name="Content Placeholder 2"/>
-          <p:cNvSpPr>
-            <a:spLocks noGrp="1"/>
-          </p:cNvSpPr>
-          <p:nvPr>
-            <p:ph idx="1"/>
-          </p:nvPr>
-        </p:nvSpPr>
-        <p:spPr/>
-        <p:txBody>
-          <a:bodyPr/>
-          <a:lstStyle/>
-          <a:p>
-            <a:r>
-              <a:t>- A combination of practices and tools integrating software development and IT operations.</a:t>
-            </a:r>
-          </a:p>
-          <a:p>
-            <a:r>
-              <a:t>- Core Principles:</a:t>
-            </a:r>
-          </a:p>
-          <a:p>
-            <a:r>
-              <a:t>  • Collaboration</a:t>
-            </a:r>
-          </a:p>
-          <a:p>
-            <a:r>
-              <a:t>  • Automation</a:t>
-            </a:r>
-          </a:p>
-          <a:p>
-            <a:r>
-              <a:t>  • Continuous integration and deployment (CI/CD).</a:t>
-            </a:r>
-          </a:p>
-        </p:txBody>
-      </p:sp>
-    </p:spTree>
-  </p:cSld>
-  <p:clrMapOvr>
-    <a:masterClrMapping/>
-  </p:clrMapOvr>
-</p:sld>
-</file>
-
-<file path=ppt/slides/slide12.xml><?xml version="1.0" encoding="utf-8"?>
-<p:sld xmlns:a="http://schemas.openxmlformats.org/drawingml/2006/main" xmlns:r="http://schemas.openxmlformats.org/officeDocument/2006/relationships" xmlns:p="http://schemas.openxmlformats.org/presentationml/2006/main">
-  <p:cSld>
-    <p:spTree>
-      <p:nvGrpSpPr>
-        <p:cNvPr id="1" name=""/>
-        <p:cNvGrpSpPr/>
-        <p:nvPr/>
-      </p:nvGrpSpPr>
-      <p:grpSpPr>
-        <a:xfrm>
-          <a:off x="0" y="0"/>
-          <a:ext cx="0" cy="0"/>
-          <a:chOff x="0" y="0"/>
-          <a:chExt cx="0" cy="0"/>
-        </a:xfrm>
-      </p:grpSpPr>
-      <p:sp>
-        <p:nvSpPr>
-          <p:cNvPr id="2" name="Title 1"/>
-          <p:cNvSpPr>
-            <a:spLocks noGrp="1"/>
-          </p:cNvSpPr>
-          <p:nvPr>
-            <p:ph type="title"/>
-          </p:nvPr>
-        </p:nvSpPr>
-        <p:spPr/>
-        <p:txBody>
-          <a:bodyPr/>
-          <a:lstStyle/>
-          <a:p>
-            <a:r>
-              <a:t>DevOps Lifecycle</a:t>
-            </a:r>
-          </a:p>
-        </p:txBody>
-      </p:sp>
-      <p:sp>
-        <p:nvSpPr>
-          <p:cNvPr id="3" name="Content Placeholder 2"/>
-          <p:cNvSpPr>
-            <a:spLocks noGrp="1"/>
-          </p:cNvSpPr>
-          <p:nvPr>
-            <p:ph idx="1"/>
-          </p:nvPr>
-        </p:nvSpPr>
-        <p:spPr/>
-        <p:txBody>
-          <a:bodyPr>
-            <a:normAutofit fontScale="92500" lnSpcReduction="10000"/>
-          </a:bodyPr>
-          <a:lstStyle/>
-          <a:p>
-            <a:r>
-              <a:t>1. Plan: Define requirements and project scope.</a:t>
-            </a:r>
-          </a:p>
-          <a:p>
-            <a:r>
-              <a:t>2. Develop: Write and test code collaboratively.</a:t>
-            </a:r>
-          </a:p>
-          <a:p>
-            <a:r>
-              <a:t>3. Build: Package applications using CI/CD pipelines.</a:t>
-            </a:r>
-          </a:p>
-          <a:p>
-            <a:r>
-              <a:t>4. Test: Automated and manual testing.</a:t>
-            </a:r>
-          </a:p>
-          <a:p>
-            <a:r>
-              <a:t>5. Release &amp; Deploy: Controlled application deployment.</a:t>
-            </a:r>
-          </a:p>
-          <a:p>
-            <a:r>
-              <a:t>6. Operate &amp; Monitor: Continuous monitoring and improvement.</a:t>
-            </a:r>
-          </a:p>
-        </p:txBody>
-      </p:sp>
-    </p:spTree>
-  </p:cSld>
-  <p:clrMapOvr>
-    <a:masterClrMapping/>
-  </p:clrMapOvr>
-</p:sld>
-</file>
-
-<file path=ppt/slides/slide13.xml><?xml version="1.0" encoding="utf-8"?>
-<p:sld xmlns:a="http://schemas.openxmlformats.org/drawingml/2006/main" xmlns:r="http://schemas.openxmlformats.org/officeDocument/2006/relationships" xmlns:p="http://schemas.openxmlformats.org/presentationml/2006/main">
-  <p:cSld>
-    <p:spTree>
-      <p:nvGrpSpPr>
-        <p:cNvPr id="1" name=""/>
-        <p:cNvGrpSpPr/>
-        <p:nvPr/>
-      </p:nvGrpSpPr>
-      <p:grpSpPr>
-        <a:xfrm>
-          <a:off x="0" y="0"/>
-          <a:ext cx="0" cy="0"/>
-          <a:chOff x="0" y="0"/>
-          <a:chExt cx="0" cy="0"/>
-        </a:xfrm>
-      </p:grpSpPr>
-      <p:sp>
-        <p:nvSpPr>
-          <p:cNvPr id="2" name="Title 1"/>
-          <p:cNvSpPr>
-            <a:spLocks noGrp="1"/>
-          </p:cNvSpPr>
-          <p:nvPr>
-            <p:ph type="title"/>
-          </p:nvPr>
-        </p:nvSpPr>
-        <p:spPr/>
-        <p:txBody>
-          <a:bodyPr/>
-          <a:lstStyle/>
-          <a:p>
-            <a:r>
-              <a:t>Summary</a:t>
-            </a:r>
-          </a:p>
-        </p:txBody>
-      </p:sp>
-      <p:sp>
-        <p:nvSpPr>
-          <p:cNvPr id="3" name="Content Placeholder 2"/>
-          <p:cNvSpPr>
-            <a:spLocks noGrp="1"/>
-          </p:cNvSpPr>
-          <p:nvPr>
-            <p:ph idx="1"/>
-          </p:nvPr>
-        </p:nvSpPr>
-        <p:spPr/>
-        <p:txBody>
-          <a:bodyPr/>
-          <a:lstStyle/>
-          <a:p>
-            <a:r>
-              <a:t>- Distributed Cloud vs Edge Computing: Centralized vs decentralized.</a:t>
-            </a:r>
-          </a:p>
-          <a:p>
-            <a:r>
-              <a:t>- Containers &amp; Docker: Lightweight application deployment.</a:t>
-            </a:r>
-          </a:p>
-          <a:p>
-            <a:r>
-              <a:t>- Kubernetes: Container orchestration.</a:t>
-            </a:r>
-          </a:p>
-          <a:p>
-            <a:r>
-              <a:t>- DevOps: Streamlined software development and deployment.</a:t>
-            </a:r>
-          </a:p>
-        </p:txBody>
-      </p:sp>
-    </p:spTree>
-  </p:cSld>
-  <p:clrMapOvr>
-    <a:masterClrMapping/>
-  </p:clrMapOvr>
-</p:sld>
-</file>
-
-<file path=ppt/slides/slide14.xml><?xml version="1.0" encoding="utf-8"?>
 <p:sld xmlns:a="http://schemas.openxmlformats.org/drawingml/2006/main" xmlns:r="http://schemas.openxmlformats.org/officeDocument/2006/relationships" xmlns:p="http://schemas.openxmlformats.org/presentationml/2006/main">
   <p:cSld>
     <p:spTree>
@@ -3828,13 +3528,11 @@
         </p:nvSpPr>
         <p:spPr/>
         <p:txBody>
-          <a:bodyPr>
-            <a:normAutofit fontScale="90000"/>
-          </a:bodyPr>
-          <a:lstStyle/>
-          <a:p>
-            <a:r>
-              <a:t>What is Distributed Cloud Computing?</a:t>
+          <a:bodyPr/>
+          <a:lstStyle/>
+          <a:p>
+            <a:r>
+              <a:t>What are Containers?</a:t>
             </a:r>
           </a:p>
         </p:txBody>
@@ -3851,13 +3549,11 @@
         </p:nvSpPr>
         <p:spPr/>
         <p:txBody>
-          <a:bodyPr>
-            <a:normAutofit fontScale="92500" lnSpcReduction="10000"/>
-          </a:bodyPr>
-          <a:lstStyle/>
-          <a:p>
-            <a:r>
-              <a:t>- Definition: A model where cloud services are distributed across different physical locations while remaining centrally managed.</a:t>
+          <a:bodyPr/>
+          <a:lstStyle/>
+          <a:p>
+            <a:r>
+              <a:t>- Lightweight, portable, and isolated units that run applications and their dependencies.</a:t>
             </a:r>
           </a:p>
           <a:p>
@@ -3867,22 +3563,17 @@
           </a:p>
           <a:p>
             <a:r>
-              <a:t>  • Enhanced scalability</a:t>
-            </a:r>
-          </a:p>
-          <a:p>
-            <a:r>
-              <a:t>  • Improved performance and latency</a:t>
-            </a:r>
-          </a:p>
-          <a:p>
-            <a:r>
-              <a:t>  • Regulatory compliance</a:t>
-            </a:r>
-          </a:p>
-          <a:p>
-            <a:r>
-              <a:t>- Use Cases: Multi-cloud strategies, disaster recovery, global applications.</a:t>
+              <a:t>  • Consistency across environments</a:t>
+            </a:r>
+          </a:p>
+          <a:p>
+            <a:r>
+              <a:t>  • Faster deployment</a:t>
+            </a:r>
+          </a:p>
+          <a:p>
+            <a:r>
+              <a:t>  • Scalability.</a:t>
             </a:r>
           </a:p>
         </p:txBody>
@@ -3896,261 +3587,6 @@
 </file>
 
 <file path=ppt/slides/slide3.xml><?xml version="1.0" encoding="utf-8"?>
-<p:sld xmlns:a="http://schemas.openxmlformats.org/drawingml/2006/main" xmlns:r="http://schemas.openxmlformats.org/officeDocument/2006/relationships" xmlns:p="http://schemas.openxmlformats.org/presentationml/2006/main">
-  <p:cSld>
-    <p:spTree>
-      <p:nvGrpSpPr>
-        <p:cNvPr id="1" name=""/>
-        <p:cNvGrpSpPr/>
-        <p:nvPr/>
-      </p:nvGrpSpPr>
-      <p:grpSpPr>
-        <a:xfrm>
-          <a:off x="0" y="0"/>
-          <a:ext cx="0" cy="0"/>
-          <a:chOff x="0" y="0"/>
-          <a:chExt cx="0" cy="0"/>
-        </a:xfrm>
-      </p:grpSpPr>
-      <p:sp>
-        <p:nvSpPr>
-          <p:cNvPr id="2" name="Title 1"/>
-          <p:cNvSpPr>
-            <a:spLocks noGrp="1"/>
-          </p:cNvSpPr>
-          <p:nvPr>
-            <p:ph type="title"/>
-          </p:nvPr>
-        </p:nvSpPr>
-        <p:spPr/>
-        <p:txBody>
-          <a:bodyPr/>
-          <a:lstStyle/>
-          <a:p>
-            <a:r>
-              <a:t>What is Edge Computing?</a:t>
-            </a:r>
-          </a:p>
-        </p:txBody>
-      </p:sp>
-      <p:sp>
-        <p:nvSpPr>
-          <p:cNvPr id="3" name="Content Placeholder 2"/>
-          <p:cNvSpPr>
-            <a:spLocks noGrp="1"/>
-          </p:cNvSpPr>
-          <p:nvPr>
-            <p:ph idx="1"/>
-          </p:nvPr>
-        </p:nvSpPr>
-        <p:spPr/>
-        <p:txBody>
-          <a:bodyPr>
-            <a:normAutofit fontScale="92500" lnSpcReduction="10000"/>
-          </a:bodyPr>
-          <a:lstStyle/>
-          <a:p>
-            <a:r>
-              <a:t>- Definition: A computing paradigm that brings computation and data storage closer to the location where it is needed.</a:t>
-            </a:r>
-          </a:p>
-          <a:p>
-            <a:r>
-              <a:t>- Key Benefits:</a:t>
-            </a:r>
-          </a:p>
-          <a:p>
-            <a:r>
-              <a:t>  • Reduced latency</a:t>
-            </a:r>
-          </a:p>
-          <a:p>
-            <a:r>
-              <a:t>  • Lower bandwidth costs</a:t>
-            </a:r>
-          </a:p>
-          <a:p>
-            <a:r>
-              <a:t>  • Real-time processing</a:t>
-            </a:r>
-          </a:p>
-          <a:p>
-            <a:r>
-              <a:t>- Use Cases: IoT, autonomous vehicles, industrial automation.</a:t>
-            </a:r>
-          </a:p>
-        </p:txBody>
-      </p:sp>
-    </p:spTree>
-  </p:cSld>
-  <p:clrMapOvr>
-    <a:masterClrMapping/>
-  </p:clrMapOvr>
-</p:sld>
-</file>
-
-<file path=ppt/slides/slide4.xml><?xml version="1.0" encoding="utf-8"?>
-<p:sld xmlns:a="http://schemas.openxmlformats.org/drawingml/2006/main" xmlns:r="http://schemas.openxmlformats.org/officeDocument/2006/relationships" xmlns:p="http://schemas.openxmlformats.org/presentationml/2006/main">
-  <p:cSld>
-    <p:spTree>
-      <p:nvGrpSpPr>
-        <p:cNvPr id="1" name=""/>
-        <p:cNvGrpSpPr/>
-        <p:nvPr/>
-      </p:nvGrpSpPr>
-      <p:grpSpPr>
-        <a:xfrm>
-          <a:off x="0" y="0"/>
-          <a:ext cx="0" cy="0"/>
-          <a:chOff x="0" y="0"/>
-          <a:chExt cx="0" cy="0"/>
-        </a:xfrm>
-      </p:grpSpPr>
-      <p:sp>
-        <p:nvSpPr>
-          <p:cNvPr id="2" name="Title 1"/>
-          <p:cNvSpPr>
-            <a:spLocks noGrp="1"/>
-          </p:cNvSpPr>
-          <p:nvPr>
-            <p:ph type="title"/>
-          </p:nvPr>
-        </p:nvSpPr>
-        <p:spPr/>
-        <p:txBody>
-          <a:bodyPr>
-            <a:normAutofit fontScale="90000"/>
-          </a:bodyPr>
-          <a:lstStyle/>
-          <a:p>
-            <a:r>
-              <a:t>Distributed Cloud vs Edge Computing</a:t>
-            </a:r>
-          </a:p>
-        </p:txBody>
-      </p:sp>
-      <p:sp>
-        <p:nvSpPr>
-          <p:cNvPr id="3" name="Content Placeholder 2"/>
-          <p:cNvSpPr>
-            <a:spLocks noGrp="1"/>
-          </p:cNvSpPr>
-          <p:nvPr>
-            <p:ph idx="1"/>
-          </p:nvPr>
-        </p:nvSpPr>
-        <p:spPr/>
-        <p:txBody>
-          <a:bodyPr/>
-          <a:lstStyle/>
-          <a:p>
-            <a:r>
-              <a:t>- Distributed Cloud: Centralized management, scalable, used for multi-cloud services.</a:t>
-            </a:r>
-          </a:p>
-          <a:p>
-            <a:r>
-              <a:t>- Edge Computing: Decentralized, ultra-low latency, used for real-time processing.</a:t>
-            </a:r>
-          </a:p>
-        </p:txBody>
-      </p:sp>
-    </p:spTree>
-  </p:cSld>
-  <p:clrMapOvr>
-    <a:masterClrMapping/>
-  </p:clrMapOvr>
-</p:sld>
-</file>
-
-<file path=ppt/slides/slide5.xml><?xml version="1.0" encoding="utf-8"?>
-<p:sld xmlns:a="http://schemas.openxmlformats.org/drawingml/2006/main" xmlns:r="http://schemas.openxmlformats.org/officeDocument/2006/relationships" xmlns:p="http://schemas.openxmlformats.org/presentationml/2006/main">
-  <p:cSld>
-    <p:spTree>
-      <p:nvGrpSpPr>
-        <p:cNvPr id="1" name=""/>
-        <p:cNvGrpSpPr/>
-        <p:nvPr/>
-      </p:nvGrpSpPr>
-      <p:grpSpPr>
-        <a:xfrm>
-          <a:off x="0" y="0"/>
-          <a:ext cx="0" cy="0"/>
-          <a:chOff x="0" y="0"/>
-          <a:chExt cx="0" cy="0"/>
-        </a:xfrm>
-      </p:grpSpPr>
-      <p:sp>
-        <p:nvSpPr>
-          <p:cNvPr id="2" name="Title 1"/>
-          <p:cNvSpPr>
-            <a:spLocks noGrp="1"/>
-          </p:cNvSpPr>
-          <p:nvPr>
-            <p:ph type="title"/>
-          </p:nvPr>
-        </p:nvSpPr>
-        <p:spPr/>
-        <p:txBody>
-          <a:bodyPr/>
-          <a:lstStyle/>
-          <a:p>
-            <a:r>
-              <a:t>What are Containers?</a:t>
-            </a:r>
-          </a:p>
-        </p:txBody>
-      </p:sp>
-      <p:sp>
-        <p:nvSpPr>
-          <p:cNvPr id="3" name="Content Placeholder 2"/>
-          <p:cNvSpPr>
-            <a:spLocks noGrp="1"/>
-          </p:cNvSpPr>
-          <p:nvPr>
-            <p:ph idx="1"/>
-          </p:nvPr>
-        </p:nvSpPr>
-        <p:spPr/>
-        <p:txBody>
-          <a:bodyPr/>
-          <a:lstStyle/>
-          <a:p>
-            <a:r>
-              <a:t>- Lightweight, portable, and isolated units that run applications and their dependencies.</a:t>
-            </a:r>
-          </a:p>
-          <a:p>
-            <a:r>
-              <a:t>- Key Benefits:</a:t>
-            </a:r>
-          </a:p>
-          <a:p>
-            <a:r>
-              <a:t>  • Consistency across environments</a:t>
-            </a:r>
-          </a:p>
-          <a:p>
-            <a:r>
-              <a:t>  • Faster deployment</a:t>
-            </a:r>
-          </a:p>
-          <a:p>
-            <a:r>
-              <a:t>  • Scalability.</a:t>
-            </a:r>
-          </a:p>
-        </p:txBody>
-      </p:sp>
-    </p:spTree>
-  </p:cSld>
-  <p:clrMapOvr>
-    <a:masterClrMapping/>
-  </p:clrMapOvr>
-</p:sld>
-</file>
-
-<file path=ppt/slides/slide6.xml><?xml version="1.0" encoding="utf-8"?>
 <p:sld xmlns:a="http://schemas.openxmlformats.org/drawingml/2006/main" xmlns:r="http://schemas.openxmlformats.org/officeDocument/2006/relationships" xmlns:p="http://schemas.openxmlformats.org/presentationml/2006/main">
   <p:cSld>
     <p:spTree>
@@ -4304,7 +3740,7 @@
 </p:sld>
 </file>
 
-<file path=ppt/slides/slide7.xml><?xml version="1.0" encoding="utf-8"?>
+<file path=ppt/slides/slide4.xml><?xml version="1.0" encoding="utf-8"?>
 <p:sld xmlns:a="http://schemas.openxmlformats.org/drawingml/2006/main" xmlns:r="http://schemas.openxmlformats.org/officeDocument/2006/relationships" xmlns:p="http://schemas.openxmlformats.org/presentationml/2006/main">
   <p:cSld>
     <p:spTree>
@@ -4391,7 +3827,7 @@
 </p:sld>
 </file>
 
-<file path=ppt/slides/slide8.xml><?xml version="1.0" encoding="utf-8"?>
+<file path=ppt/slides/slide5.xml><?xml version="1.0" encoding="utf-8"?>
 <p:sld xmlns:a="http://schemas.openxmlformats.org/drawingml/2006/main" xmlns:r="http://schemas.openxmlformats.org/officeDocument/2006/relationships" xmlns:p="http://schemas.openxmlformats.org/presentationml/2006/main">
   <p:cSld>
     <p:spTree>
@@ -4498,6 +3934,296 @@
 </p:sld>
 </file>
 
+<file path=ppt/slides/slide6.xml><?xml version="1.0" encoding="utf-8"?>
+<p:sld xmlns:a="http://schemas.openxmlformats.org/drawingml/2006/main" xmlns:r="http://schemas.openxmlformats.org/officeDocument/2006/relationships" xmlns:p="http://schemas.openxmlformats.org/presentationml/2006/main">
+  <p:cSld>
+    <p:spTree>
+      <p:nvGrpSpPr>
+        <p:cNvPr id="1" name=""/>
+        <p:cNvGrpSpPr/>
+        <p:nvPr/>
+      </p:nvGrpSpPr>
+      <p:grpSpPr>
+        <a:xfrm>
+          <a:off x="0" y="0"/>
+          <a:ext cx="0" cy="0"/>
+          <a:chOff x="0" y="0"/>
+          <a:chExt cx="0" cy="0"/>
+        </a:xfrm>
+      </p:grpSpPr>
+      <p:sp>
+        <p:nvSpPr>
+          <p:cNvPr id="2" name="Title 1"/>
+          <p:cNvSpPr>
+            <a:spLocks noGrp="1"/>
+          </p:cNvSpPr>
+          <p:nvPr>
+            <p:ph type="title"/>
+          </p:nvPr>
+        </p:nvSpPr>
+        <p:spPr/>
+        <p:txBody>
+          <a:bodyPr/>
+          <a:lstStyle/>
+          <a:p>
+            <a:r>
+              <a:t>Kubernetes Overview</a:t>
+            </a:r>
+          </a:p>
+        </p:txBody>
+      </p:sp>
+      <p:sp>
+        <p:nvSpPr>
+          <p:cNvPr id="3" name="Content Placeholder 2"/>
+          <p:cNvSpPr>
+            <a:spLocks noGrp="1"/>
+          </p:cNvSpPr>
+          <p:nvPr>
+            <p:ph idx="1"/>
+          </p:nvPr>
+        </p:nvSpPr>
+        <p:spPr/>
+        <p:txBody>
+          <a:bodyPr/>
+          <a:lstStyle/>
+          <a:p>
+            <a:r>
+              <a:t>- Open-source container orchestration platform for managing, scaling, and deploying containers.</a:t>
+            </a:r>
+          </a:p>
+          <a:p>
+            <a:r>
+              <a:t>- Key Features:</a:t>
+            </a:r>
+          </a:p>
+          <a:p>
+            <a:r>
+              <a:t>  • Automated scaling</a:t>
+            </a:r>
+          </a:p>
+          <a:p>
+            <a:r>
+              <a:t>  • Self-healing capabilities</a:t>
+            </a:r>
+          </a:p>
+          <a:p>
+            <a:r>
+              <a:t>  • Load balancing.</a:t>
+            </a:r>
+          </a:p>
+        </p:txBody>
+      </p:sp>
+    </p:spTree>
+  </p:cSld>
+  <p:clrMapOvr>
+    <a:masterClrMapping/>
+  </p:clrMapOvr>
+</p:sld>
+</file>
+
+<file path=ppt/slides/slide7.xml><?xml version="1.0" encoding="utf-8"?>
+<p:sld xmlns:a="http://schemas.openxmlformats.org/drawingml/2006/main" xmlns:r="http://schemas.openxmlformats.org/officeDocument/2006/relationships" xmlns:p="http://schemas.openxmlformats.org/presentationml/2006/main">
+  <p:cSld>
+    <p:spTree>
+      <p:nvGrpSpPr>
+        <p:cNvPr id="1" name=""/>
+        <p:cNvGrpSpPr/>
+        <p:nvPr/>
+      </p:nvGrpSpPr>
+      <p:grpSpPr>
+        <a:xfrm>
+          <a:off x="0" y="0"/>
+          <a:ext cx="0" cy="0"/>
+          <a:chOff x="0" y="0"/>
+          <a:chExt cx="0" cy="0"/>
+        </a:xfrm>
+      </p:grpSpPr>
+      <p:sp>
+        <p:nvSpPr>
+          <p:cNvPr id="2" name="Title 1"/>
+          <p:cNvSpPr>
+            <a:spLocks noGrp="1"/>
+          </p:cNvSpPr>
+          <p:nvPr>
+            <p:ph type="title"/>
+          </p:nvPr>
+        </p:nvSpPr>
+        <p:spPr>
+          <a:xfrm>
+            <a:off x="457200" y="274638"/>
+            <a:ext cx="8229600" cy="1143000"/>
+          </a:xfrm>
+        </p:spPr>
+        <p:txBody>
+          <a:bodyPr/>
+          <a:lstStyle/>
+          <a:p>
+            <a:r>
+              <a:t>Docker vs Kubernetes</a:t>
+            </a:r>
+          </a:p>
+        </p:txBody>
+      </p:sp>
+      <p:sp>
+        <p:nvSpPr>
+          <p:cNvPr id="3" name="Content Placeholder 2"/>
+          <p:cNvSpPr>
+            <a:spLocks noGrp="1"/>
+          </p:cNvSpPr>
+          <p:nvPr>
+            <p:ph idx="1"/>
+          </p:nvPr>
+        </p:nvSpPr>
+        <p:spPr>
+          <a:xfrm>
+            <a:off x="457200" y="1166018"/>
+            <a:ext cx="8229600" cy="4525963"/>
+          </a:xfrm>
+        </p:spPr>
+        <p:txBody>
+          <a:bodyPr>
+            <a:normAutofit/>
+          </a:bodyPr>
+          <a:lstStyle/>
+          <a:p>
+            <a:r>
+              <a:rPr sz="2400" dirty="0"/>
+              <a:t>- Docker: Containerization, limited scalability, manual deployment.</a:t>
+            </a:r>
+          </a:p>
+          <a:p>
+            <a:r>
+              <a:rPr sz="2400" dirty="0"/>
+              <a:t>- Kubernetes: Orchestration, highly scalable, automated deployment.</a:t>
+            </a:r>
+          </a:p>
+        </p:txBody>
+      </p:sp>
+      <p:pic>
+        <p:nvPicPr>
+          <p:cNvPr id="6" name="Picture 5">
+            <a:extLst>
+              <a:ext uri="{FF2B5EF4-FFF2-40B4-BE49-F238E27FC236}">
+                <a16:creationId xmlns:a16="http://schemas.microsoft.com/office/drawing/2014/main" id="{95E59E98-2656-46DB-9721-5127C417DECA}"/>
+              </a:ext>
+            </a:extLst>
+          </p:cNvPr>
+          <p:cNvPicPr>
+            <a:picLocks noChangeAspect="1"/>
+          </p:cNvPicPr>
+          <p:nvPr/>
+        </p:nvPicPr>
+        <p:blipFill>
+          <a:blip r:embed="rId2"/>
+          <a:stretch>
+            <a:fillRect/>
+          </a:stretch>
+        </p:blipFill>
+        <p:spPr>
+          <a:xfrm>
+            <a:off x="1035864" y="2822139"/>
+            <a:ext cx="7323283" cy="3381438"/>
+          </a:xfrm>
+          <a:prstGeom prst="rect">
+            <a:avLst/>
+          </a:prstGeom>
+        </p:spPr>
+      </p:pic>
+    </p:spTree>
+  </p:cSld>
+  <p:clrMapOvr>
+    <a:masterClrMapping/>
+  </p:clrMapOvr>
+</p:sld>
+</file>
+
+<file path=ppt/slides/slide8.xml><?xml version="1.0" encoding="utf-8"?>
+<p:sld xmlns:a="http://schemas.openxmlformats.org/drawingml/2006/main" xmlns:r="http://schemas.openxmlformats.org/officeDocument/2006/relationships" xmlns:p="http://schemas.openxmlformats.org/presentationml/2006/main">
+  <p:cSld>
+    <p:spTree>
+      <p:nvGrpSpPr>
+        <p:cNvPr id="1" name=""/>
+        <p:cNvGrpSpPr/>
+        <p:nvPr/>
+      </p:nvGrpSpPr>
+      <p:grpSpPr>
+        <a:xfrm>
+          <a:off x="0" y="0"/>
+          <a:ext cx="0" cy="0"/>
+          <a:chOff x="0" y="0"/>
+          <a:chExt cx="0" cy="0"/>
+        </a:xfrm>
+      </p:grpSpPr>
+      <p:sp>
+        <p:nvSpPr>
+          <p:cNvPr id="2" name="Title 1"/>
+          <p:cNvSpPr>
+            <a:spLocks noGrp="1"/>
+          </p:cNvSpPr>
+          <p:nvPr>
+            <p:ph type="title"/>
+          </p:nvPr>
+        </p:nvSpPr>
+        <p:spPr/>
+        <p:txBody>
+          <a:bodyPr/>
+          <a:lstStyle/>
+          <a:p>
+            <a:r>
+              <a:t>What is DevOps?</a:t>
+            </a:r>
+          </a:p>
+        </p:txBody>
+      </p:sp>
+      <p:sp>
+        <p:nvSpPr>
+          <p:cNvPr id="3" name="Content Placeholder 2"/>
+          <p:cNvSpPr>
+            <a:spLocks noGrp="1"/>
+          </p:cNvSpPr>
+          <p:nvPr>
+            <p:ph idx="1"/>
+          </p:nvPr>
+        </p:nvSpPr>
+        <p:spPr/>
+        <p:txBody>
+          <a:bodyPr/>
+          <a:lstStyle/>
+          <a:p>
+            <a:r>
+              <a:t>- A combination of practices and tools integrating software development and IT operations.</a:t>
+            </a:r>
+          </a:p>
+          <a:p>
+            <a:r>
+              <a:t>- Core Principles:</a:t>
+            </a:r>
+          </a:p>
+          <a:p>
+            <a:r>
+              <a:t>  • Collaboration</a:t>
+            </a:r>
+          </a:p>
+          <a:p>
+            <a:r>
+              <a:t>  • Automation</a:t>
+            </a:r>
+          </a:p>
+          <a:p>
+            <a:r>
+              <a:t>  • Continuous integration and deployment (CI/CD).</a:t>
+            </a:r>
+          </a:p>
+        </p:txBody>
+      </p:sp>
+    </p:spTree>
+  </p:cSld>
+  <p:clrMapOvr>
+    <a:masterClrMapping/>
+  </p:clrMapOvr>
+</p:sld>
+</file>
+
 <file path=ppt/slides/slide9.xml><?xml version="1.0" encoding="utf-8"?>
 <p:sld xmlns:a="http://schemas.openxmlformats.org/drawingml/2006/main" xmlns:r="http://schemas.openxmlformats.org/officeDocument/2006/relationships" xmlns:p="http://schemas.openxmlformats.org/presentationml/2006/main">
   <p:cSld>
@@ -4531,7 +4257,7 @@
           <a:lstStyle/>
           <a:p>
             <a:r>
-              <a:t>Kubernetes Overview</a:t>
+              <a:t>DevOps Lifecycle</a:t>
             </a:r>
           </a:p>
         </p:txBody>
@@ -4548,31 +4274,38 @@
         </p:nvSpPr>
         <p:spPr/>
         <p:txBody>
-          <a:bodyPr/>
-          <a:lstStyle/>
-          <a:p>
-            <a:r>
-              <a:t>- Open-source container orchestration platform for managing, scaling, and deploying containers.</a:t>
-            </a:r>
-          </a:p>
-          <a:p>
-            <a:r>
-              <a:t>- Key Features:</a:t>
-            </a:r>
-          </a:p>
-          <a:p>
-            <a:r>
-              <a:t>  • Automated scaling</a:t>
-            </a:r>
-          </a:p>
-          <a:p>
-            <a:r>
-              <a:t>  • Self-healing capabilities</a:t>
-            </a:r>
-          </a:p>
-          <a:p>
-            <a:r>
-              <a:t>  • Load balancing.</a:t>
+          <a:bodyPr>
+            <a:normAutofit fontScale="92500" lnSpcReduction="10000"/>
+          </a:bodyPr>
+          <a:lstStyle/>
+          <a:p>
+            <a:r>
+              <a:t>1. Plan: Define requirements and project scope.</a:t>
+            </a:r>
+          </a:p>
+          <a:p>
+            <a:r>
+              <a:t>2. Develop: Write and test code collaboratively.</a:t>
+            </a:r>
+          </a:p>
+          <a:p>
+            <a:r>
+              <a:t>3. Build: Package applications using CI/CD pipelines.</a:t>
+            </a:r>
+          </a:p>
+          <a:p>
+            <a:r>
+              <a:t>4. Test: Automated and manual testing.</a:t>
+            </a:r>
+          </a:p>
+          <a:p>
+            <a:r>
+              <a:t>5. Release &amp; Deploy: Controlled application deployment.</a:t>
+            </a:r>
+          </a:p>
+          <a:p>
+            <a:r>
+              <a:t>6. Operate &amp; Monitor: Continuous monitoring and improvement.</a:t>
             </a:r>
           </a:p>
         </p:txBody>
